--- a/classes/parte-9-forense-digital-y-respuesta-a-incidentes/215-playbooks-de-respuesta-a-incidentes/clase-215-presentacion.pptx
+++ b/classes/parte-9-forense-digital-y-respuesta-a-incidentes/215-playbooks-de-respuesta-a-incidentes/clase-215-presentacion.pptx
@@ -17,6 +17,11 @@
     <p:sldId id="265" r:id="rId16"/>
     <p:sldId id="266" r:id="rId17"/>
     <p:sldId id="267" r:id="rId18"/>
+    <p:sldId id="268" r:id="rId19"/>
+    <p:sldId id="269" r:id="rId20"/>
+    <p:sldId id="270" r:id="rId21"/>
+    <p:sldId id="271" r:id="rId22"/>
+    <p:sldId id="272" r:id="rId23"/>
   </p:sldIdLst>
   <p:sldSz cx="9144000" cy="6858000" type="screen4x3"/>
   <p:notesSz cx="6858000" cy="9144000"/>
@@ -3198,7 +3203,7 @@
                   <a:srgbClr val="0B3D2E"/>
                 </a:solidFill>
               </a:rPr>
-              <a:t>⚠️ Errores comunes</a:t>
+              <a:t>🧰 Herramientas y preparación</a:t>
             </a:r>
           </a:p>
         </p:txBody>
@@ -3236,67 +3241,52 @@
                   <a:srgbClr val="22282E"/>
                 </a:solidFill>
               </a:rPr>
-              <a:t>•  El playbook es teoría, no acción — Faltan pasos concretos. Escribe comandos/acciones verificables.</a:t>
-            </a:r>
-          </a:p>
-          <a:p>
-            <a:pPr>
-              <a:spcAft>
-                <a:spcPts val="600"/>
-              </a:spcAft>
-            </a:pPr>
-            <a:r>
-              <a:rPr sz="1500">
-                <a:solidFill>
-                  <a:srgbClr val="22282E"/>
-                </a:solidFill>
-              </a:rPr>
-              <a:t>•  Nadie sabe cuándo escalar — Sin criterios de escalado. Defínelos por adelantado.</a:t>
-            </a:r>
-          </a:p>
-          <a:p>
-            <a:pPr>
-              <a:spcAft>
-                <a:spcPts val="600"/>
-              </a:spcAft>
-            </a:pPr>
-            <a:r>
-              <a:rPr sz="1500">
-                <a:solidFill>
-                  <a:srgbClr val="22282E"/>
-                </a:solidFill>
-              </a:rPr>
-              <a:t>•  Puntos de decisión ambiguos — Criterio subjetivo. Hazlos binarios y objetivos.</a:t>
-            </a:r>
-          </a:p>
-          <a:p>
-            <a:pPr>
-              <a:spcAft>
-                <a:spcPts val="600"/>
-              </a:spcAft>
-            </a:pPr>
-            <a:r>
-              <a:rPr sz="1500">
-                <a:solidFill>
-                  <a:srgbClr val="22282E"/>
-                </a:solidFill>
-              </a:rPr>
-              <a:t>•  Playbook desactualizado — Sin mantenimiento. Revísalo tras cada incidente.</a:t>
-            </a:r>
-          </a:p>
-          <a:p>
-            <a:pPr>
-              <a:spcAft>
-                <a:spcPts val="600"/>
-              </a:spcAft>
-            </a:pPr>
-            <a:r>
-              <a:rPr sz="1500">
-                <a:solidFill>
-                  <a:srgbClr val="22282E"/>
-                </a:solidFill>
-              </a:rPr>
-              <a:t>•  Todo manual, sin escala — No identificaste tareas automatizables. Marca las repetibles para SOAR.</a:t>
+              <a:t>•  Documentación: plantilla de playbook (fases PICERL), diagramas de flujo.</a:t>
+            </a:r>
+          </a:p>
+          <a:p>
+            <a:pPr>
+              <a:spcAft>
+                <a:spcPts val="600"/>
+              </a:spcAft>
+            </a:pPr>
+            <a:r>
+              <a:rPr sz="1500">
+                <a:solidFill>
+                  <a:srgbClr val="22282E"/>
+                </a:solidFill>
+              </a:rPr>
+              <a:t>•  SOAR/casos: TheHive + Cortex (gratuitos), o Shuffle para automatización.</a:t>
+            </a:r>
+          </a:p>
+          <a:p>
+            <a:pPr>
+              <a:spcAft>
+                <a:spcPts val="600"/>
+              </a:spcAft>
+            </a:pPr>
+            <a:r>
+              <a:rPr sz="1500">
+                <a:solidFill>
+                  <a:srgbClr val="22282E"/>
+                </a:solidFill>
+              </a:rPr>
+              <a:t>•  Inteligencia: MITRE ATT&amp;CK Navigator, MISP para IOCs.</a:t>
+            </a:r>
+          </a:p>
+          <a:p>
+            <a:pPr>
+              <a:spcAft>
+                <a:spcPts val="600"/>
+              </a:spcAft>
+            </a:pPr>
+            <a:r>
+              <a:rPr sz="1500">
+                <a:solidFill>
+                  <a:srgbClr val="22282E"/>
+                </a:solidFill>
+              </a:rPr>
+              <a:t>•  Ejercicio aplicado: no requiere entorno ofensivo; es diseño de proceso.</a:t>
             </a:r>
           </a:p>
         </p:txBody>
@@ -3347,7 +3337,7 @@
                   <a:srgbClr val="0B3D2E"/>
                 </a:solidFill>
               </a:rPr>
-              <a:t>❓ Preguntas frecuentes</a:t>
+              <a:t>🧪 Laboratorio guiado</a:t>
             </a:r>
           </a:p>
         </p:txBody>
@@ -3385,97 +3375,97 @@
                   <a:srgbClr val="22282E"/>
                 </a:solidFill>
               </a:rPr>
-              <a:t>•  ❓ ¿Playbook o runbook?</a:t>
-            </a:r>
-          </a:p>
-          <a:p>
-            <a:pPr>
-              <a:spcAft>
-                <a:spcPts val="600"/>
-              </a:spcAft>
-            </a:pPr>
-            <a:r>
-              <a:rPr sz="1500">
-                <a:solidFill>
-                  <a:srgbClr val="22282E"/>
-                </a:solidFill>
-              </a:rPr>
-              <a:t>•  El playbook orquesta la respuesta a un tipo de incidente; el runbook detalla una tarea técnica dentro de él.</a:t>
-            </a:r>
-          </a:p>
-          <a:p>
-            <a:pPr>
-              <a:spcAft>
-                <a:spcPts val="600"/>
-              </a:spcAft>
-            </a:pPr>
-            <a:r>
-              <a:rPr sz="1500">
-                <a:solidFill>
-                  <a:srgbClr val="22282E"/>
-                </a:solidFill>
-              </a:rPr>
-              <a:t>•  ❓ ¿Cuántos playbooks necesito?</a:t>
-            </a:r>
-          </a:p>
-          <a:p>
-            <a:pPr>
-              <a:spcAft>
-                <a:spcPts val="600"/>
-              </a:spcAft>
-            </a:pPr>
-            <a:r>
-              <a:rPr sz="1500">
-                <a:solidFill>
-                  <a:srgbClr val="22282E"/>
-                </a:solidFill>
-              </a:rPr>
-              <a:t>•  Empieza por los incidentes más frecuentes y dañinos: phishing, ransomware, cuenta comprometida, malware. Amplía según tu contexto.</a:t>
-            </a:r>
-          </a:p>
-          <a:p>
-            <a:pPr>
-              <a:spcAft>
-                <a:spcPts val="600"/>
-              </a:spcAft>
-            </a:pPr>
-            <a:r>
-              <a:rPr sz="1500">
-                <a:solidFill>
-                  <a:srgbClr val="22282E"/>
-                </a:solidFill>
-              </a:rPr>
-              <a:t>•  ❓ ¿SOAR reemplaza al analista?</a:t>
-            </a:r>
-          </a:p>
-          <a:p>
-            <a:pPr>
-              <a:spcAft>
-                <a:spcPts val="600"/>
-              </a:spcAft>
-            </a:pPr>
-            <a:r>
-              <a:rPr sz="1500">
-                <a:solidFill>
-                  <a:srgbClr val="22282E"/>
-                </a:solidFill>
-              </a:rPr>
-              <a:t>•  No. Automatiza lo repetible (enriquecer IOCs, bloquear, notificar) para que el analista se enfoque en decisiones.</a:t>
-            </a:r>
-          </a:p>
-          <a:p>
-            <a:pPr>
-              <a:spcAft>
-                <a:spcPts val="600"/>
-              </a:spcAft>
-            </a:pPr>
-            <a:r>
-              <a:rPr sz="1500">
-                <a:solidFill>
-                  <a:srgbClr val="22282E"/>
-                </a:solidFill>
-              </a:rPr>
-              <a:t>•  ❓ ¿Cómo evito que caduquen?</a:t>
+              <a:t>•  Elige un tipo de incidente (empieza por phishing) y define su alcance y disparadores.</a:t>
+            </a:r>
+          </a:p>
+          <a:p>
+            <a:pPr>
+              <a:spcAft>
+                <a:spcPts val="600"/>
+              </a:spcAft>
+            </a:pPr>
+            <a:r>
+              <a:rPr sz="1500">
+                <a:solidFill>
+                  <a:srgbClr val="22282E"/>
+                </a:solidFill>
+              </a:rPr>
+              <a:t>•  Estructura el playbook por fases PICERL. Para detección/identificación, define:</a:t>
+            </a:r>
+          </a:p>
+          <a:p>
+            <a:pPr>
+              <a:spcAft>
+                <a:spcPts val="600"/>
+              </a:spcAft>
+            </a:pPr>
+            <a:r>
+              <a:rPr sz="1500">
+                <a:solidFill>
+                  <a:srgbClr val="22282E"/>
+                </a:solidFill>
+              </a:rPr>
+              <a:t>•  Fuentes de alerta (reporte de usuario, gateway de correo, EDR).</a:t>
+            </a:r>
+          </a:p>
+          <a:p>
+            <a:pPr>
+              <a:spcAft>
+                <a:spcPts val="600"/>
+              </a:spcAft>
+            </a:pPr>
+            <a:r>
+              <a:rPr sz="1500">
+                <a:solidFill>
+                  <a:srgbClr val="22282E"/>
+                </a:solidFill>
+              </a:rPr>
+              <a:t>•  Cómo validar que es phishing real.</a:t>
+            </a:r>
+          </a:p>
+          <a:p>
+            <a:pPr>
+              <a:spcAft>
+                <a:spcPts val="600"/>
+              </a:spcAft>
+            </a:pPr>
+            <a:r>
+              <a:rPr sz="1500">
+                <a:solidFill>
+                  <a:srgbClr val="22282E"/>
+                </a:solidFill>
+              </a:rPr>
+              <a:t>•  Para contención, escribe pasos concretos:</a:t>
+            </a:r>
+          </a:p>
+          <a:p>
+            <a:pPr>
+              <a:spcAft>
+                <a:spcPts val="600"/>
+              </a:spcAft>
+            </a:pPr>
+            <a:r>
+              <a:rPr sz="1500">
+                <a:solidFill>
+                  <a:srgbClr val="22282E"/>
+                </a:solidFill>
+              </a:rPr>
+              <a:t>•  Aislar el buzón, bloquear el remitente/dominio, buscar quién más lo recibió (búsqueda retroactiva por IOC).</a:t>
+            </a:r>
+          </a:p>
+          <a:p>
+            <a:pPr>
+              <a:spcAft>
+                <a:spcPts val="600"/>
+              </a:spcAft>
+            </a:pPr>
+            <a:r>
+              <a:rPr sz="1500">
+                <a:solidFill>
+                  <a:srgbClr val="22282E"/>
+                </a:solidFill>
+              </a:rPr>
+              <a:t>•  Añade puntos de decisión con criterio: "¿el usuario hizo clic? → sí: revisar credenciales y sesión; no: cerrar".</a:t>
             </a:r>
           </a:p>
         </p:txBody>
@@ -3526,7 +3516,7 @@
                   <a:srgbClr val="0B3D2E"/>
                 </a:solidFill>
               </a:rPr>
-              <a:t>🔗 Referencias</a:t>
+              <a:t>✍️ Ejercicios</a:t>
             </a:r>
           </a:p>
         </p:txBody>
@@ -3564,56 +3554,742 @@
                   <a:srgbClr val="22282E"/>
                 </a:solidFill>
               </a:rPr>
-              <a:t>•  Roberts &amp; Brown — Intelligence-Driven Incident Response, O'Reilly 2017.</a:t>
-            </a:r>
-          </a:p>
-          <a:p>
-            <a:pPr>
-              <a:spcAft>
-                <a:spcPts val="600"/>
-              </a:spcAft>
-            </a:pPr>
-            <a:r>
-              <a:rPr sz="1500">
-                <a:solidFill>
-                  <a:srgbClr val="22282E"/>
-                </a:solidFill>
-              </a:rPr>
-              <a:t>•  NIST SP 800-61 Rev. 2: &lt;https://csrc.nist.gov/publications/detail/sp/800-61/rev-2/final&gt;</a:t>
-            </a:r>
-          </a:p>
-          <a:p>
-            <a:pPr>
-              <a:spcAft>
-                <a:spcPts val="600"/>
-              </a:spcAft>
-            </a:pPr>
-            <a:r>
-              <a:rPr sz="1500">
-                <a:solidFill>
-                  <a:srgbClr val="22282E"/>
-                </a:solidFill>
-              </a:rPr>
-              <a:t>•  MITRE ATT&amp;CK: &lt;https://attack.mitre.org/&gt;</a:t>
-            </a:r>
-          </a:p>
-          <a:p>
-            <a:pPr>
-              <a:spcAft>
-                <a:spcPts val="600"/>
-              </a:spcAft>
-            </a:pPr>
-            <a:r>
-              <a:rPr sz="1500">
-                <a:solidFill>
-                  <a:srgbClr val="22282E"/>
-                </a:solidFill>
-              </a:rPr>
-              <a:t>•  TheHive &amp; Cortex: &lt;https://thehive-project.org/&gt;</a:t>
-            </a:r>
-          </a:p>
-        </p:txBody>
-      </p:sp>
+              <a:t>•  Escribe la fase de contención de un playbook de ransomware.</a:t>
+            </a:r>
+          </a:p>
+          <a:p>
+            <a:pPr>
+              <a:spcAft>
+                <a:spcPts val="600"/>
+              </a:spcAft>
+            </a:pPr>
+            <a:r>
+              <a:rPr sz="1500">
+                <a:solidFill>
+                  <a:srgbClr val="22282E"/>
+                </a:solidFill>
+              </a:rPr>
+              <a:t>•  Define cinco puntos de decisión para una cuenta comprometida.</a:t>
+            </a:r>
+          </a:p>
+          <a:p>
+            <a:pPr>
+              <a:spcAft>
+                <a:spcPts val="600"/>
+              </a:spcAft>
+            </a:pPr>
+            <a:r>
+              <a:rPr sz="1500">
+                <a:solidFill>
+                  <a:srgbClr val="22282E"/>
+                </a:solidFill>
+              </a:rPr>
+              <a:t>•  Mapea un playbook de malware a tres técnicas ATT&amp;CK.</a:t>
+            </a:r>
+          </a:p>
+          <a:p>
+            <a:pPr>
+              <a:spcAft>
+                <a:spcPts val="600"/>
+              </a:spcAft>
+            </a:pPr>
+            <a:r>
+              <a:rPr sz="1500">
+                <a:solidFill>
+                  <a:srgbClr val="22282E"/>
+                </a:solidFill>
+              </a:rPr>
+              <a:t>•  Diseña los criterios de escalado a legal y dirección.</a:t>
+            </a:r>
+          </a:p>
+          <a:p>
+            <a:pPr>
+              <a:spcAft>
+                <a:spcPts val="600"/>
+              </a:spcAft>
+            </a:pPr>
+            <a:r>
+              <a:rPr sz="1500">
+                <a:solidFill>
+                  <a:srgbClr val="22282E"/>
+                </a:solidFill>
+              </a:rPr>
+              <a:t>•  Identifica qué tres pasos automatizarías con SOAR y por qué.</a:t>
+            </a:r>
+          </a:p>
+          <a:p>
+            <a:pPr>
+              <a:spcAft>
+                <a:spcPts val="600"/>
+              </a:spcAft>
+            </a:pPr>
+            <a:r>
+              <a:rPr sz="1500">
+                <a:solidFill>
+                  <a:srgbClr val="22282E"/>
+                </a:solidFill>
+              </a:rPr>
+              <a:t>•  Crea un diagrama de flujo del playbook de phishing.</a:t>
+            </a:r>
+          </a:p>
+        </p:txBody>
+      </p:sp>
+    </p:spTree>
+  </p:cSld>
+  <p:clrMapOvr>
+    <a:masterClrMapping/>
+  </p:clrMapOvr>
+</p:sld>
+</file>
+
+<file path=ppt/slides/slide13.xml><?xml version="1.0" encoding="utf-8"?>
+<p:sld xmlns:a="http://schemas.openxmlformats.org/drawingml/2006/main" xmlns:p="http://schemas.openxmlformats.org/presentationml/2006/main" xmlns:r="http://schemas.openxmlformats.org/officeDocument/2006/relationships">
+  <p:cSld>
+    <p:spTree>
+      <p:nvGrpSpPr>
+        <p:cNvPr id="1" name=""/>
+        <p:cNvGrpSpPr/>
+        <p:nvPr/>
+      </p:nvGrpSpPr>
+      <p:grpSpPr/>
+      <p:sp>
+        <p:nvSpPr>
+          <p:cNvPr id="2" name="TextBox 1"/>
+          <p:cNvSpPr txBox="1"/>
+          <p:nvPr/>
+        </p:nvSpPr>
+        <p:spPr>
+          <a:xfrm>
+            <a:off x="457200" y="320040"/>
+            <a:ext cx="8229600" cy="822960"/>
+          </a:xfrm>
+          <a:prstGeom prst="rect">
+            <a:avLst/>
+          </a:prstGeom>
+          <a:noFill/>
+        </p:spPr>
+        <p:txBody>
+          <a:bodyPr wrap="square">
+            <a:spAutoFit/>
+          </a:bodyPr>
+          <a:lstStyle/>
+          <a:p>
+            <a:r>
+              <a:rPr sz="2600" b="1">
+                <a:solidFill>
+                  <a:srgbClr val="0B3D2E"/>
+                </a:solidFill>
+              </a:rPr>
+              <a:t>📝 Reto verificable</a:t>
+            </a:r>
+          </a:p>
+        </p:txBody>
+      </p:sp>
+      <p:sp>
+        <p:nvSpPr>
+          <p:cNvPr id="3" name="TextBox 2"/>
+          <p:cNvSpPr txBox="1"/>
+          <p:nvPr/>
+        </p:nvSpPr>
+        <p:spPr>
+          <a:xfrm>
+            <a:off x="457200" y="1280160"/>
+            <a:ext cx="8229600" cy="4937760"/>
+          </a:xfrm>
+          <a:prstGeom prst="rect">
+            <a:avLst/>
+          </a:prstGeom>
+          <a:noFill/>
+        </p:spPr>
+        <p:txBody>
+          <a:bodyPr wrap="square">
+            <a:spAutoFit/>
+          </a:bodyPr>
+          <a:lstStyle/>
+          <a:p>
+            <a:pPr>
+              <a:spcAft>
+                <a:spcPts val="600"/>
+              </a:spcAft>
+            </a:pPr>
+            <a:r>
+              <a:rPr sz="1500">
+                <a:solidFill>
+                  <a:srgbClr val="22282E"/>
+                </a:solidFill>
+              </a:rPr>
+              <a:t>•  Diseña un playbook completo para "cuenta de correo corporativa comprometida" con las seis fases PICERL, al menos cuatro puntos de decisión, mapeo a ATT&amp;CK, criterios de escalado y tres pasos marcados…</a:t>
+            </a:r>
+          </a:p>
+          <a:p>
+            <a:pPr>
+              <a:spcAft>
+                <a:spcPts val="600"/>
+              </a:spcAft>
+            </a:pPr>
+            <a:r>
+              <a:rPr sz="1500">
+                <a:solidFill>
+                  <a:srgbClr val="22282E"/>
+                </a:solidFill>
+              </a:rPr>
+              <a:t>•  Criterio de aceptación: el playbook es ejecutable por otra persona sin ayuda, cada fase tiene pasos numerados con responsable, los puntos de decisión tienen criterio explícito, y hay al menos tres…</a:t>
+            </a:r>
+          </a:p>
+        </p:txBody>
+      </p:sp>
+    </p:spTree>
+  </p:cSld>
+  <p:clrMapOvr>
+    <a:masterClrMapping/>
+  </p:clrMapOvr>
+</p:sld>
+</file>
+
+<file path=ppt/slides/slide14.xml><?xml version="1.0" encoding="utf-8"?>
+<p:sld xmlns:a="http://schemas.openxmlformats.org/drawingml/2006/main" xmlns:p="http://schemas.openxmlformats.org/presentationml/2006/main" xmlns:r="http://schemas.openxmlformats.org/officeDocument/2006/relationships">
+  <p:cSld>
+    <p:spTree>
+      <p:nvGrpSpPr>
+        <p:cNvPr id="1" name=""/>
+        <p:cNvGrpSpPr/>
+        <p:nvPr/>
+      </p:nvGrpSpPr>
+      <p:grpSpPr/>
+      <p:sp>
+        <p:nvSpPr>
+          <p:cNvPr id="2" name="TextBox 1"/>
+          <p:cNvSpPr txBox="1"/>
+          <p:nvPr/>
+        </p:nvSpPr>
+        <p:spPr>
+          <a:xfrm>
+            <a:off x="457200" y="320040"/>
+            <a:ext cx="8229600" cy="822960"/>
+          </a:xfrm>
+          <a:prstGeom prst="rect">
+            <a:avLst/>
+          </a:prstGeom>
+          <a:noFill/>
+        </p:spPr>
+        <p:txBody>
+          <a:bodyPr wrap="square">
+            <a:spAutoFit/>
+          </a:bodyPr>
+          <a:lstStyle/>
+          <a:p>
+            <a:r>
+              <a:rPr sz="2600" b="1">
+                <a:solidFill>
+                  <a:srgbClr val="0B3D2E"/>
+                </a:solidFill>
+              </a:rPr>
+              <a:t>⚠️ Errores comunes</a:t>
+            </a:r>
+          </a:p>
+        </p:txBody>
+      </p:sp>
+      <p:sp>
+        <p:nvSpPr>
+          <p:cNvPr id="3" name="TextBox 2"/>
+          <p:cNvSpPr txBox="1"/>
+          <p:nvPr/>
+        </p:nvSpPr>
+        <p:spPr>
+          <a:xfrm>
+            <a:off x="457200" y="1280160"/>
+            <a:ext cx="8229600" cy="4937760"/>
+          </a:xfrm>
+          <a:prstGeom prst="rect">
+            <a:avLst/>
+          </a:prstGeom>
+          <a:noFill/>
+        </p:spPr>
+        <p:txBody>
+          <a:bodyPr wrap="square">
+            <a:spAutoFit/>
+          </a:bodyPr>
+          <a:lstStyle/>
+          <a:p>
+            <a:pPr>
+              <a:spcAft>
+                <a:spcPts val="600"/>
+              </a:spcAft>
+            </a:pPr>
+            <a:r>
+              <a:rPr sz="1500">
+                <a:solidFill>
+                  <a:srgbClr val="22282E"/>
+                </a:solidFill>
+              </a:rPr>
+              <a:t>•  El playbook es teoría, no acción — Faltan pasos concretos. Escribe comandos/acciones verificables.</a:t>
+            </a:r>
+          </a:p>
+          <a:p>
+            <a:pPr>
+              <a:spcAft>
+                <a:spcPts val="600"/>
+              </a:spcAft>
+            </a:pPr>
+            <a:r>
+              <a:rPr sz="1500">
+                <a:solidFill>
+                  <a:srgbClr val="22282E"/>
+                </a:solidFill>
+              </a:rPr>
+              <a:t>•  Nadie sabe cuándo escalar — Sin criterios de escalado. Defínelos por adelantado.</a:t>
+            </a:r>
+          </a:p>
+          <a:p>
+            <a:pPr>
+              <a:spcAft>
+                <a:spcPts val="600"/>
+              </a:spcAft>
+            </a:pPr>
+            <a:r>
+              <a:rPr sz="1500">
+                <a:solidFill>
+                  <a:srgbClr val="22282E"/>
+                </a:solidFill>
+              </a:rPr>
+              <a:t>•  Puntos de decisión ambiguos — Criterio subjetivo. Hazlos binarios y objetivos.</a:t>
+            </a:r>
+          </a:p>
+          <a:p>
+            <a:pPr>
+              <a:spcAft>
+                <a:spcPts val="600"/>
+              </a:spcAft>
+            </a:pPr>
+            <a:r>
+              <a:rPr sz="1500">
+                <a:solidFill>
+                  <a:srgbClr val="22282E"/>
+                </a:solidFill>
+              </a:rPr>
+              <a:t>•  Playbook desactualizado — Sin mantenimiento. Revísalo tras cada incidente.</a:t>
+            </a:r>
+          </a:p>
+          <a:p>
+            <a:pPr>
+              <a:spcAft>
+                <a:spcPts val="600"/>
+              </a:spcAft>
+            </a:pPr>
+            <a:r>
+              <a:rPr sz="1500">
+                <a:solidFill>
+                  <a:srgbClr val="22282E"/>
+                </a:solidFill>
+              </a:rPr>
+              <a:t>•  Todo manual, sin escala — No identificaste tareas automatizables. Marca las repetibles para SOAR.</a:t>
+            </a:r>
+          </a:p>
+        </p:txBody>
+      </p:sp>
+    </p:spTree>
+  </p:cSld>
+  <p:clrMapOvr>
+    <a:masterClrMapping/>
+  </p:clrMapOvr>
+</p:sld>
+</file>
+
+<file path=ppt/slides/slide15.xml><?xml version="1.0" encoding="utf-8"?>
+<p:sld xmlns:a="http://schemas.openxmlformats.org/drawingml/2006/main" xmlns:p="http://schemas.openxmlformats.org/presentationml/2006/main" xmlns:r="http://schemas.openxmlformats.org/officeDocument/2006/relationships">
+  <p:cSld>
+    <p:spTree>
+      <p:nvGrpSpPr>
+        <p:cNvPr id="1" name=""/>
+        <p:cNvGrpSpPr/>
+        <p:nvPr/>
+      </p:nvGrpSpPr>
+      <p:grpSpPr/>
+      <p:sp>
+        <p:nvSpPr>
+          <p:cNvPr id="2" name="TextBox 1"/>
+          <p:cNvSpPr txBox="1"/>
+          <p:nvPr/>
+        </p:nvSpPr>
+        <p:spPr>
+          <a:xfrm>
+            <a:off x="457200" y="320040"/>
+            <a:ext cx="8229600" cy="822960"/>
+          </a:xfrm>
+          <a:prstGeom prst="rect">
+            <a:avLst/>
+          </a:prstGeom>
+          <a:noFill/>
+        </p:spPr>
+        <p:txBody>
+          <a:bodyPr wrap="square">
+            <a:spAutoFit/>
+          </a:bodyPr>
+          <a:lstStyle/>
+          <a:p>
+            <a:r>
+              <a:rPr sz="2600" b="1">
+                <a:solidFill>
+                  <a:srgbClr val="0B3D2E"/>
+                </a:solidFill>
+              </a:rPr>
+              <a:t>❓ Preguntas frecuentes</a:t>
+            </a:r>
+          </a:p>
+        </p:txBody>
+      </p:sp>
+      <p:sp>
+        <p:nvSpPr>
+          <p:cNvPr id="3" name="TextBox 2"/>
+          <p:cNvSpPr txBox="1"/>
+          <p:nvPr/>
+        </p:nvSpPr>
+        <p:spPr>
+          <a:xfrm>
+            <a:off x="457200" y="1280160"/>
+            <a:ext cx="8229600" cy="4937760"/>
+          </a:xfrm>
+          <a:prstGeom prst="rect">
+            <a:avLst/>
+          </a:prstGeom>
+          <a:noFill/>
+        </p:spPr>
+        <p:txBody>
+          <a:bodyPr wrap="square">
+            <a:spAutoFit/>
+          </a:bodyPr>
+          <a:lstStyle/>
+          <a:p>
+            <a:pPr>
+              <a:spcAft>
+                <a:spcPts val="600"/>
+              </a:spcAft>
+            </a:pPr>
+            <a:r>
+              <a:rPr sz="1500">
+                <a:solidFill>
+                  <a:srgbClr val="22282E"/>
+                </a:solidFill>
+              </a:rPr>
+              <a:t>•  ❓ ¿Playbook o runbook?</a:t>
+            </a:r>
+          </a:p>
+          <a:p>
+            <a:pPr>
+              <a:spcAft>
+                <a:spcPts val="600"/>
+              </a:spcAft>
+            </a:pPr>
+            <a:r>
+              <a:rPr sz="1500">
+                <a:solidFill>
+                  <a:srgbClr val="22282E"/>
+                </a:solidFill>
+              </a:rPr>
+              <a:t>•  El playbook orquesta la respuesta a un tipo de incidente; el runbook detalla una tarea técnica dentro de él.</a:t>
+            </a:r>
+          </a:p>
+          <a:p>
+            <a:pPr>
+              <a:spcAft>
+                <a:spcPts val="600"/>
+              </a:spcAft>
+            </a:pPr>
+            <a:r>
+              <a:rPr sz="1500">
+                <a:solidFill>
+                  <a:srgbClr val="22282E"/>
+                </a:solidFill>
+              </a:rPr>
+              <a:t>•  ❓ ¿Cuántos playbooks necesito?</a:t>
+            </a:r>
+          </a:p>
+          <a:p>
+            <a:pPr>
+              <a:spcAft>
+                <a:spcPts val="600"/>
+              </a:spcAft>
+            </a:pPr>
+            <a:r>
+              <a:rPr sz="1500">
+                <a:solidFill>
+                  <a:srgbClr val="22282E"/>
+                </a:solidFill>
+              </a:rPr>
+              <a:t>•  Prioriza con datos de riesgo, incidentes, amenazas y dependencias de tu organización. Phishing, ransomware, cuenta comprometida y malware son plantillas iniciales posibles, no un ranking universal.</a:t>
+            </a:r>
+          </a:p>
+          <a:p>
+            <a:pPr>
+              <a:spcAft>
+                <a:spcPts val="600"/>
+              </a:spcAft>
+            </a:pPr>
+            <a:r>
+              <a:rPr sz="1500">
+                <a:solidFill>
+                  <a:srgbClr val="22282E"/>
+                </a:solidFill>
+              </a:rPr>
+              <a:t>•  ❓ ¿SOAR reemplaza al analista?</a:t>
+            </a:r>
+          </a:p>
+          <a:p>
+            <a:pPr>
+              <a:spcAft>
+                <a:spcPts val="600"/>
+              </a:spcAft>
+            </a:pPr>
+            <a:r>
+              <a:rPr sz="1500">
+                <a:solidFill>
+                  <a:srgbClr val="22282E"/>
+                </a:solidFill>
+              </a:rPr>
+              <a:t>•  No. Automatiza lo repetible (enriquecer IOCs, bloquear, notificar) para que el analista se enfoque en decisiones.</a:t>
+            </a:r>
+          </a:p>
+          <a:p>
+            <a:pPr>
+              <a:spcAft>
+                <a:spcPts val="600"/>
+              </a:spcAft>
+            </a:pPr>
+            <a:r>
+              <a:rPr sz="1500">
+                <a:solidFill>
+                  <a:srgbClr val="22282E"/>
+                </a:solidFill>
+              </a:rPr>
+              <a:t>•  ❓ ¿Cómo evito que caduquen?</a:t>
+            </a:r>
+          </a:p>
+        </p:txBody>
+      </p:sp>
+    </p:spTree>
+  </p:cSld>
+  <p:clrMapOvr>
+    <a:masterClrMapping/>
+  </p:clrMapOvr>
+</p:sld>
+</file>
+
+<file path=ppt/slides/slide16.xml><?xml version="1.0" encoding="utf-8"?>
+<p:sld xmlns:a="http://schemas.openxmlformats.org/drawingml/2006/main" xmlns:p="http://schemas.openxmlformats.org/presentationml/2006/main" xmlns:r="http://schemas.openxmlformats.org/officeDocument/2006/relationships">
+  <p:cSld>
+    <p:spTree>
+      <p:nvGrpSpPr>
+        <p:cNvPr id="1" name=""/>
+        <p:cNvGrpSpPr/>
+        <p:nvPr/>
+      </p:nvGrpSpPr>
+      <p:grpSpPr/>
+      <p:sp>
+        <p:nvSpPr>
+          <p:cNvPr id="2" name="TextBox 1"/>
+          <p:cNvSpPr txBox="1"/>
+          <p:nvPr/>
+        </p:nvSpPr>
+        <p:spPr>
+          <a:xfrm>
+            <a:off x="457200" y="320040"/>
+            <a:ext cx="8229600" cy="822960"/>
+          </a:xfrm>
+          <a:prstGeom prst="rect">
+            <a:avLst/>
+          </a:prstGeom>
+          <a:noFill/>
+        </p:spPr>
+        <p:txBody>
+          <a:bodyPr wrap="square">
+            <a:spAutoFit/>
+          </a:bodyPr>
+          <a:lstStyle/>
+          <a:p>
+            <a:r>
+              <a:rPr sz="2600" b="1">
+                <a:solidFill>
+                  <a:srgbClr val="0B3D2E"/>
+                </a:solidFill>
+              </a:rPr>
+              <a:t>🔗 Referencias verificables y alcance</a:t>
+            </a:r>
+          </a:p>
+        </p:txBody>
+      </p:sp>
+      <p:sp>
+        <p:nvSpPr>
+          <p:cNvPr id="3" name="TextBox 2"/>
+          <p:cNvSpPr txBox="1"/>
+          <p:nvPr/>
+        </p:nvSpPr>
+        <p:spPr>
+          <a:xfrm>
+            <a:off x="457200" y="1280160"/>
+            <a:ext cx="8229600" cy="4937760"/>
+          </a:xfrm>
+          <a:prstGeom prst="rect">
+            <a:avLst/>
+          </a:prstGeom>
+          <a:noFill/>
+        </p:spPr>
+        <p:txBody>
+          <a:bodyPr wrap="square">
+            <a:spAutoFit/>
+          </a:bodyPr>
+          <a:lstStyle/>
+          <a:p>
+            <a:pPr>
+              <a:spcAft>
+                <a:spcPts val="600"/>
+              </a:spcAft>
+            </a:pPr>
+            <a:r>
+              <a:rPr sz="1500">
+                <a:solidFill>
+                  <a:srgbClr val="22282E"/>
+                </a:solidFill>
+              </a:rPr>
+              <a:t>•  NIST SP 800-61 Rev. 3: &lt;https://doi.org/10.6028/NIST.SP.800-61r3&gt; — recomendaciones actuales que integran respuesta a incidentes con CSF 2.0; reemplaza Rev. 2.</a:t>
+            </a:r>
+          </a:p>
+          <a:p>
+            <a:pPr>
+              <a:spcAft>
+                <a:spcPts val="600"/>
+              </a:spcAft>
+            </a:pPr>
+            <a:r>
+              <a:rPr sz="1500">
+                <a:solidFill>
+                  <a:srgbClr val="22282E"/>
+                </a:solidFill>
+              </a:rPr>
+              <a:t>•  CISA Incident and Vulnerability Response Playbooks: &lt;https://www.cisa.gov/sites/default/files/publications/CybersecurityIncidentVulnerabilityResponsePlaybooks508C.pdf&gt; — ejemplo oficial de pasos…</a:t>
+            </a:r>
+          </a:p>
+          <a:p>
+            <a:pPr>
+              <a:spcAft>
+                <a:spcPts val="600"/>
+              </a:spcAft>
+            </a:pPr>
+            <a:r>
+              <a:rPr sz="1500">
+                <a:solidFill>
+                  <a:srgbClr val="22282E"/>
+                </a:solidFill>
+              </a:rPr>
+              <a:t>•  MITRE ATT&amp;CK: &lt;https://attack.mitre.org/&gt; — lenguaje y conocimiento de comportamientos para búsquedas y cobertura; no es un procedimiento de respuesta.</a:t>
+            </a:r>
+          </a:p>
+          <a:p>
+            <a:pPr>
+              <a:spcAft>
+                <a:spcPts val="600"/>
+              </a:spcAft>
+            </a:pPr>
+            <a:r>
+              <a:rPr sz="1500">
+                <a:solidFill>
+                  <a:srgbClr val="22282E"/>
+                </a:solidFill>
+              </a:rPr>
+              <a:t>•  TheHive: &lt;https://docs.strangebee.com/thehive/&gt; — documentación oficial de gestión de casos y observables; la herramienta no define por sí sola autoridad operativa.</a:t>
+            </a:r>
+          </a:p>
+          <a:p>
+            <a:pPr>
+              <a:spcAft>
+                <a:spcPts val="600"/>
+              </a:spcAft>
+            </a:pPr>
+            <a:r>
+              <a:rPr sz="1500">
+                <a:solidFill>
+                  <a:srgbClr val="22282E"/>
+                </a:solidFill>
+              </a:rPr>
+              <a:t>•  Roberts y Brown — Intelligence-Driven Incident Response, O’Reilly, 2017: enfoque de respuesta guiada por inteligencia; complementar con normas y arquitectura actuales.</a:t>
+            </a:r>
+          </a:p>
+        </p:txBody>
+      </p:sp>
+    </p:spTree>
+  </p:cSld>
+  <p:clrMapOvr>
+    <a:masterClrMapping/>
+  </p:clrMapOvr>
+</p:sld>
+</file>
+
+<file path=ppt/slides/slide17.xml><?xml version="1.0" encoding="utf-8"?>
+<p:sld xmlns:a="http://schemas.openxmlformats.org/drawingml/2006/main" xmlns:p="http://schemas.openxmlformats.org/presentationml/2006/main" xmlns:r="http://schemas.openxmlformats.org/officeDocument/2006/relationships">
+  <p:cSld>
+    <p:spTree>
+      <p:nvGrpSpPr>
+        <p:cNvPr id="1" name=""/>
+        <p:cNvGrpSpPr/>
+        <p:nvPr/>
+      </p:nvGrpSpPr>
+      <p:grpSpPr/>
+      <p:sp>
+        <p:nvSpPr>
+          <p:cNvPr id="2" name="TextBox 1"/>
+          <p:cNvSpPr txBox="1"/>
+          <p:nvPr/>
+        </p:nvSpPr>
+        <p:spPr>
+          <a:xfrm>
+            <a:off x="457200" y="274320"/>
+            <a:ext cx="8229600" cy="640080"/>
+          </a:xfrm>
+          <a:prstGeom prst="rect">
+            <a:avLst/>
+          </a:prstGeom>
+          <a:noFill/>
+        </p:spPr>
+        <p:txBody>
+          <a:bodyPr wrap="square">
+            <a:spAutoFit/>
+          </a:bodyPr>
+          <a:lstStyle/>
+          <a:p>
+            <a:r>
+              <a:rPr sz="2200" b="1">
+                <a:solidFill>
+                  <a:srgbClr val="0B3D2E"/>
+                </a:solidFill>
+              </a:rPr>
+              <a:t>Diagrama de la clase</a:t>
+            </a:r>
+          </a:p>
+        </p:txBody>
+      </p:sp>
+      <p:pic>
+        <p:nvPicPr>
+          <p:cNvPr id="3" name="Picture 2" descr="94d55c445ce8a599.png"/>
+          <p:cNvPicPr>
+            <a:picLocks noChangeAspect="1"/>
+          </p:cNvPicPr>
+          <p:nvPr/>
+        </p:nvPicPr>
+        <p:blipFill>
+          <a:blip r:embed="rId2"/>
+          <a:stretch>
+            <a:fillRect/>
+          </a:stretch>
+        </p:blipFill>
+        <p:spPr>
+          <a:xfrm>
+            <a:off x="457200" y="3264408"/>
+            <a:ext cx="8229600" cy="969264"/>
+          </a:xfrm>
+          <a:prstGeom prst="rect">
+            <a:avLst/>
+          </a:prstGeom>
+        </p:spPr>
+      </p:pic>
     </p:spTree>
   </p:cSld>
   <p:clrMapOvr>
@@ -3698,7 +4374,7 @@
                   <a:srgbClr val="22282E"/>
                 </a:solidFill>
               </a:rPr>
-              <a:t>•  Aprender a diseñar playbooks de respuesta: procedimientos estructurados y repetibles que guían al equipo paso a paso ante tipos concretos de incidente (phishing, ransomware, cuenta comprometida, malware). Al terminar podrás escribir playbooks accionables e integrarlos con automatización (SOAR).</a:t>
+              <a:t>•  Aprender a diseñar playbooks de respuesta: procedimientos estructurados y repetibles que guían al equipo paso a paso ante tipos concretos de incidente (phishing, ransomware, cuenta comprometida…</a:t>
             </a:r>
           </a:p>
         </p:txBody>
@@ -4092,7 +4768,7 @@
                   <a:srgbClr val="0B3D2E"/>
                 </a:solidFill>
               </a:rPr>
-              <a:t>📖 Definiciones y características</a:t>
+              <a:t>🧠 Explicación en profundidad</a:t>
             </a:r>
           </a:p>
         </p:txBody>
@@ -4130,97 +4806,97 @@
                   <a:srgbClr val="22282E"/>
                 </a:solidFill>
               </a:rPr>
-              <a:t>•  Playbook: procedimiento estructurado para un tipo de incidente. Característica: repetible y accionable, no un ensayo teórico.</a:t>
-            </a:r>
-          </a:p>
-          <a:p>
-            <a:pPr>
-              <a:spcAft>
-                <a:spcPts val="600"/>
-              </a:spcAft>
-            </a:pPr>
-            <a:r>
-              <a:rPr sz="1500">
-                <a:solidFill>
-                  <a:srgbClr val="22282E"/>
-                </a:solidFill>
-              </a:rPr>
-              <a:t>•  Runbook: pasos técnicos detallados de una tarea concreta dentro del playbook. Característica: más granular.</a:t>
-            </a:r>
-          </a:p>
-          <a:p>
-            <a:pPr>
-              <a:spcAft>
-                <a:spcPts val="600"/>
-              </a:spcAft>
-            </a:pPr>
-            <a:r>
-              <a:rPr sz="1500">
-                <a:solidFill>
-                  <a:srgbClr val="22282E"/>
-                </a:solidFill>
-              </a:rPr>
-              <a:t>•  Punto de decisión: bifurcación con criterio explícito (p. ej. "¿hay cifrado activo? → sí/no"). Característica: evita improvisar bajo presión.</a:t>
-            </a:r>
-          </a:p>
-          <a:p>
-            <a:pPr>
-              <a:spcAft>
-                <a:spcPts val="600"/>
-              </a:spcAft>
-            </a:pPr>
-            <a:r>
-              <a:rPr sz="1500">
-                <a:solidFill>
-                  <a:srgbClr val="22282E"/>
-                </a:solidFill>
-              </a:rPr>
-              <a:t>•  Escalado: paso a un nivel superior (líder, legal, dirección). Característica: se dispara por criterios definidos.</a:t>
-            </a:r>
-          </a:p>
-          <a:p>
-            <a:pPr>
-              <a:spcAft>
-                <a:spcPts val="600"/>
-              </a:spcAft>
-            </a:pPr>
-            <a:r>
-              <a:rPr sz="1500">
-                <a:solidFill>
-                  <a:srgbClr val="22282E"/>
-                </a:solidFill>
-              </a:rPr>
-              <a:t>•  SOAR: Security Orchestration, Automation and Response. Característica: automatiza tareas repetibles del playbook.</a:t>
-            </a:r>
-          </a:p>
-          <a:p>
-            <a:pPr>
-              <a:spcAft>
-                <a:spcPts val="600"/>
-              </a:spcAft>
-            </a:pPr>
-            <a:r>
-              <a:rPr sz="1500">
-                <a:solidFill>
-                  <a:srgbClr val="22282E"/>
-                </a:solidFill>
-              </a:rPr>
-              <a:t>•  IOC: indicador de compromiso (hash, IP, dominio). Característica: alimenta el bloqueo y la búsqueda retroactiva.</a:t>
-            </a:r>
-          </a:p>
-          <a:p>
-            <a:pPr>
-              <a:spcAft>
-                <a:spcPts val="600"/>
-              </a:spcAft>
-            </a:pPr>
-            <a:r>
-              <a:rPr sz="1500">
-                <a:solidFill>
-                  <a:srgbClr val="22282E"/>
-                </a:solidFill>
-              </a:rPr>
-              <a:t>•  ATT&amp;CK: matriz de tácticas/técnicas del adversario. Característica: da un lenguaje común para describir el ataque.</a:t>
+              <a:t>•  Un playbook convierte política y conocimiento técnico en decisiones repetibles. No es una lista rígida: define disparadores, información mínima, ramas, responsables, aprobaciones, comunicaciones…</a:t>
+            </a:r>
+          </a:p>
+          <a:p>
+            <a:pPr>
+              <a:spcAft>
+                <a:spcPts val="600"/>
+              </a:spcAft>
+            </a:pPr>
+            <a:r>
+              <a:rPr sz="1500">
+                <a:solidFill>
+                  <a:srgbClr val="22282E"/>
+                </a:solidFill>
+              </a:rPr>
+              <a:t>•  Runbook detalla una tarea; playbook coordina varias. Los contactos, credenciales de emergencia y dependencias se prueban, no se suponen. Cada acción de contención incluye efecto empresarial y…</a:t>
+            </a:r>
+          </a:p>
+          <a:p>
+            <a:pPr>
+              <a:spcAft>
+                <a:spcPts val="600"/>
+              </a:spcAft>
+            </a:pPr>
+            <a:r>
+              <a:rPr sz="1500">
+                <a:solidFill>
+                  <a:srgbClr val="22282E"/>
+                </a:solidFill>
+              </a:rPr>
+              <a:t>•  El documento une señal de entrada, severidad, responsables, fuentes mínimas, decisiones y criterios de salida. «Investigar el correo» no es un paso ejecutable; «preservar el .eml, calcular SHA-256 y…</a:t>
+            </a:r>
+          </a:p>
+          <a:p>
+            <a:pPr>
+              <a:spcAft>
+                <a:spcPts val="600"/>
+              </a:spcAft>
+            </a:pPr>
+            <a:r>
+              <a:rPr sz="1500">
+                <a:solidFill>
+                  <a:srgbClr val="22282E"/>
+                </a:solidFill>
+              </a:rPr>
+              <a:t>•  Las ramas se construyen con criterios observables, aunque no siempre binarios: cifrado activo, privilegio administrativo, datos regulados, propagación o impacto de continuidad. El playbook también…</a:t>
+            </a:r>
+          </a:p>
+          <a:p>
+            <a:pPr>
+              <a:spcAft>
+                <a:spcPts val="600"/>
+              </a:spcAft>
+            </a:pPr>
+            <a:r>
+              <a:rPr sz="1500">
+                <a:solidFill>
+                  <a:srgbClr val="22282E"/>
+                </a:solidFill>
+              </a:rPr>
+              <a:t>•  En phishing se preserva mensaje, se busca alcance entre destinatarios, se correlaciona navegación y se evalúa identidad. En ransomware se priorizan propagación, backups, claves, sistemas críticos y…</a:t>
+            </a:r>
+          </a:p>
+          <a:p>
+            <a:pPr>
+              <a:spcAft>
+                <a:spcPts val="600"/>
+              </a:spcAft>
+            </a:pPr>
+            <a:r>
+              <a:rPr sz="1500">
+                <a:solidFill>
+                  <a:srgbClr val="22282E"/>
+                </a:solidFill>
+              </a:rPr>
+              <a:t>•  ATT&amp;CK ayuda a describir comportamientos y diseñar búsquedas, pero no reemplaza la lógica de respuesta. Un IOC puede caducar o compartirse con infraestructura legítima; un playbook incluye…</a:t>
+            </a:r>
+          </a:p>
+          <a:p>
+            <a:pPr>
+              <a:spcAft>
+                <a:spcPts val="600"/>
+              </a:spcAft>
+            </a:pPr>
+            <a:r>
+              <a:rPr sz="1500">
+                <a:solidFill>
+                  <a:srgbClr val="22282E"/>
+                </a:solidFill>
+              </a:rPr>
+              <a:t>•  Cada playbook tiene propietario, versión, cambios, dependencias y fecha de la última prueba. Un tabletop prueba autoridad y coordinación; una prueba técnica valida comandos y permisos. Los hallazgos…</a:t>
             </a:r>
           </a:p>
         </p:txBody>
@@ -4271,7 +4947,7 @@
                   <a:srgbClr val="0B3D2E"/>
                 </a:solidFill>
               </a:rPr>
-              <a:t>🧰 Herramientas y preparación</a:t>
+              <a:t>📔 Glosario</a:t>
             </a:r>
           </a:p>
         </p:txBody>
@@ -4309,52 +4985,97 @@
                   <a:srgbClr val="22282E"/>
                 </a:solidFill>
               </a:rPr>
-              <a:t>•  Documentación: plantilla de playbook (fases PICERL), diagramas de flujo.</a:t>
-            </a:r>
-          </a:p>
-          <a:p>
-            <a:pPr>
-              <a:spcAft>
-                <a:spcPts val="600"/>
-              </a:spcAft>
-            </a:pPr>
-            <a:r>
-              <a:rPr sz="1500">
-                <a:solidFill>
-                  <a:srgbClr val="22282E"/>
-                </a:solidFill>
-              </a:rPr>
-              <a:t>•  SOAR/casos: TheHive + Cortex (gratuitos), o Shuffle para automatización.</a:t>
-            </a:r>
-          </a:p>
-          <a:p>
-            <a:pPr>
-              <a:spcAft>
-                <a:spcPts val="600"/>
-              </a:spcAft>
-            </a:pPr>
-            <a:r>
-              <a:rPr sz="1500">
-                <a:solidFill>
-                  <a:srgbClr val="22282E"/>
-                </a:solidFill>
-              </a:rPr>
-              <a:t>•  Inteligencia: MITRE ATT&amp;CK Navigator, MISP para IOCs.</a:t>
-            </a:r>
-          </a:p>
-          <a:p>
-            <a:pPr>
-              <a:spcAft>
-                <a:spcPts val="600"/>
-              </a:spcAft>
-            </a:pPr>
-            <a:r>
-              <a:rPr sz="1500">
-                <a:solidFill>
-                  <a:srgbClr val="22282E"/>
-                </a:solidFill>
-              </a:rPr>
-              <a:t>•  Ejercicio aplicado: no requiere entorno ofensivo; es diseño de proceso.</a:t>
+              <a:t>•  Playbook: flujo de decisiones y tareas de un escenario.</a:t>
+            </a:r>
+          </a:p>
+          <a:p>
+            <a:pPr>
+              <a:spcAft>
+                <a:spcPts val="600"/>
+              </a:spcAft>
+            </a:pPr>
+            <a:r>
+              <a:rPr sz="1500">
+                <a:solidFill>
+                  <a:srgbClr val="22282E"/>
+                </a:solidFill>
+              </a:rPr>
+              <a:t>•  Runbook: procedimiento técnico específico.</a:t>
+            </a:r>
+          </a:p>
+          <a:p>
+            <a:pPr>
+              <a:spcAft>
+                <a:spcPts val="600"/>
+              </a:spcAft>
+            </a:pPr>
+            <a:r>
+              <a:rPr sz="1500">
+                <a:solidFill>
+                  <a:srgbClr val="22282E"/>
+                </a:solidFill>
+              </a:rPr>
+              <a:t>•  Trigger: condición que inicia el flujo.</a:t>
+            </a:r>
+          </a:p>
+          <a:p>
+            <a:pPr>
+              <a:spcAft>
+                <a:spcPts val="600"/>
+              </a:spcAft>
+            </a:pPr>
+            <a:r>
+              <a:rPr sz="1500">
+                <a:solidFill>
+                  <a:srgbClr val="22282E"/>
+                </a:solidFill>
+              </a:rPr>
+              <a:t>•  Decision gate: punto que exige criterio o aprobación.</a:t>
+            </a:r>
+          </a:p>
+          <a:p>
+            <a:pPr>
+              <a:spcAft>
+                <a:spcPts val="600"/>
+              </a:spcAft>
+            </a:pPr>
+            <a:r>
+              <a:rPr sz="1500">
+                <a:solidFill>
+                  <a:srgbClr val="22282E"/>
+                </a:solidFill>
+              </a:rPr>
+              <a:t>•  Escalation path: ruta formal hacia mayor autoridad.</a:t>
+            </a:r>
+          </a:p>
+          <a:p>
+            <a:pPr>
+              <a:spcAft>
+                <a:spcPts val="600"/>
+              </a:spcAft>
+            </a:pPr>
+            <a:r>
+              <a:rPr sz="1500">
+                <a:solidFill>
+                  <a:srgbClr val="22282E"/>
+                </a:solidFill>
+              </a:rPr>
+              <a:t>•  Out-of-band: canal separado de sistemas posiblemente afectados.</a:t>
+            </a:r>
+          </a:p>
+          <a:p>
+            <a:pPr>
+              <a:spcAft>
+                <a:spcPts val="600"/>
+              </a:spcAft>
+            </a:pPr>
+            <a:r>
+              <a:rPr sz="1500">
+                <a:solidFill>
+                  <a:srgbClr val="22282E"/>
+                </a:solidFill>
+              </a:rPr>
+              <a:t>•  Versionado: historial controlado de cambios.</a:t>
             </a:r>
           </a:p>
         </p:txBody>
@@ -4405,7 +5126,7 @@
                   <a:srgbClr val="0B3D2E"/>
                 </a:solidFill>
               </a:rPr>
-              <a:t>🧪 Laboratorio guiado</a:t>
+              <a:t>📖 Definiciones y características</a:t>
             </a:r>
           </a:p>
         </p:txBody>
@@ -4443,97 +5164,97 @@
                   <a:srgbClr val="22282E"/>
                 </a:solidFill>
               </a:rPr>
-              <a:t>•  Elige un tipo de incidente (empieza por phishing) y define su alcance y disparadores.</a:t>
-            </a:r>
-          </a:p>
-          <a:p>
-            <a:pPr>
-              <a:spcAft>
-                <a:spcPts val="600"/>
-              </a:spcAft>
-            </a:pPr>
-            <a:r>
-              <a:rPr sz="1500">
-                <a:solidFill>
-                  <a:srgbClr val="22282E"/>
-                </a:solidFill>
-              </a:rPr>
-              <a:t>•  Estructura el playbook por fases PICERL. Para detección/identificación, define:</a:t>
-            </a:r>
-          </a:p>
-          <a:p>
-            <a:pPr>
-              <a:spcAft>
-                <a:spcPts val="600"/>
-              </a:spcAft>
-            </a:pPr>
-            <a:r>
-              <a:rPr sz="1500">
-                <a:solidFill>
-                  <a:srgbClr val="22282E"/>
-                </a:solidFill>
-              </a:rPr>
-              <a:t>•  Fuentes de alerta (reporte de usuario, gateway de correo, EDR).</a:t>
-            </a:r>
-          </a:p>
-          <a:p>
-            <a:pPr>
-              <a:spcAft>
-                <a:spcPts val="600"/>
-              </a:spcAft>
-            </a:pPr>
-            <a:r>
-              <a:rPr sz="1500">
-                <a:solidFill>
-                  <a:srgbClr val="22282E"/>
-                </a:solidFill>
-              </a:rPr>
-              <a:t>•  Cómo validar que es phishing real.</a:t>
-            </a:r>
-          </a:p>
-          <a:p>
-            <a:pPr>
-              <a:spcAft>
-                <a:spcPts val="600"/>
-              </a:spcAft>
-            </a:pPr>
-            <a:r>
-              <a:rPr sz="1500">
-                <a:solidFill>
-                  <a:srgbClr val="22282E"/>
-                </a:solidFill>
-              </a:rPr>
-              <a:t>•  Para contención, escribe pasos concretos:</a:t>
-            </a:r>
-          </a:p>
-          <a:p>
-            <a:pPr>
-              <a:spcAft>
-                <a:spcPts val="600"/>
-              </a:spcAft>
-            </a:pPr>
-            <a:r>
-              <a:rPr sz="1500">
-                <a:solidFill>
-                  <a:srgbClr val="22282E"/>
-                </a:solidFill>
-              </a:rPr>
-              <a:t>•  Aislar el buzón, bloquear el remitente/dominio, buscar quién más lo recibió (búsqueda retroactiva por IOC).</a:t>
-            </a:r>
-          </a:p>
-          <a:p>
-            <a:pPr>
-              <a:spcAft>
-                <a:spcPts val="600"/>
-              </a:spcAft>
-            </a:pPr>
-            <a:r>
-              <a:rPr sz="1500">
-                <a:solidFill>
-                  <a:srgbClr val="22282E"/>
-                </a:solidFill>
-              </a:rPr>
-              <a:t>•  Añade puntos de decisión con criterio: "¿el usuario hizo clic? → sí: revisar credenciales y sesión; no: cerrar".</a:t>
+              <a:t>•  Playbook: procedimiento estructurado para un tipo de incidente. Característica: repetible y accionable, no un ensayo teórico.</a:t>
+            </a:r>
+          </a:p>
+          <a:p>
+            <a:pPr>
+              <a:spcAft>
+                <a:spcPts val="600"/>
+              </a:spcAft>
+            </a:pPr>
+            <a:r>
+              <a:rPr sz="1500">
+                <a:solidFill>
+                  <a:srgbClr val="22282E"/>
+                </a:solidFill>
+              </a:rPr>
+              <a:t>•  Runbook: pasos técnicos detallados de una tarea concreta dentro del playbook. Característica: más granular.</a:t>
+            </a:r>
+          </a:p>
+          <a:p>
+            <a:pPr>
+              <a:spcAft>
+                <a:spcPts val="600"/>
+              </a:spcAft>
+            </a:pPr>
+            <a:r>
+              <a:rPr sz="1500">
+                <a:solidFill>
+                  <a:srgbClr val="22282E"/>
+                </a:solidFill>
+              </a:rPr>
+              <a:t>•  Punto de decisión: bifurcación con criterio explícito (p. ej. "¿hay cifrado activo? → sí/no"). Característica: evita improvisar bajo presión.</a:t>
+            </a:r>
+          </a:p>
+          <a:p>
+            <a:pPr>
+              <a:spcAft>
+                <a:spcPts val="600"/>
+              </a:spcAft>
+            </a:pPr>
+            <a:r>
+              <a:rPr sz="1500">
+                <a:solidFill>
+                  <a:srgbClr val="22282E"/>
+                </a:solidFill>
+              </a:rPr>
+              <a:t>•  Escalado: paso a un nivel superior (líder, legal, dirección). Característica: se dispara por criterios definidos.</a:t>
+            </a:r>
+          </a:p>
+          <a:p>
+            <a:pPr>
+              <a:spcAft>
+                <a:spcPts val="600"/>
+              </a:spcAft>
+            </a:pPr>
+            <a:r>
+              <a:rPr sz="1500">
+                <a:solidFill>
+                  <a:srgbClr val="22282E"/>
+                </a:solidFill>
+              </a:rPr>
+              <a:t>•  SOAR: Security Orchestration, Automation and Response. Característica: automatiza tareas repetibles del playbook.</a:t>
+            </a:r>
+          </a:p>
+          <a:p>
+            <a:pPr>
+              <a:spcAft>
+                <a:spcPts val="600"/>
+              </a:spcAft>
+            </a:pPr>
+            <a:r>
+              <a:rPr sz="1500">
+                <a:solidFill>
+                  <a:srgbClr val="22282E"/>
+                </a:solidFill>
+              </a:rPr>
+              <a:t>•  IOC: indicador de compromiso (hash, IP, dominio). Característica: alimenta el bloqueo y la búsqueda retroactiva.</a:t>
+            </a:r>
+          </a:p>
+          <a:p>
+            <a:pPr>
+              <a:spcAft>
+                <a:spcPts val="600"/>
+              </a:spcAft>
+            </a:pPr>
+            <a:r>
+              <a:rPr sz="1500">
+                <a:solidFill>
+                  <a:srgbClr val="22282E"/>
+                </a:solidFill>
+              </a:rPr>
+              <a:t>•  ATT&amp;CK: matriz de tácticas/técnicas del adversario. Característica: da un lenguaje común para describir el ataque.</a:t>
             </a:r>
           </a:p>
         </p:txBody>
@@ -4584,7 +5305,7 @@
                   <a:srgbClr val="0B3D2E"/>
                 </a:solidFill>
               </a:rPr>
-              <a:t>✍️ Ejercicios</a:t>
+              <a:t>🔍 Caso razonado — cifrado activo en un servidor de archivos</a:t>
             </a:r>
           </a:p>
         </p:txBody>
@@ -4622,82 +5343,22 @@
                   <a:srgbClr val="22282E"/>
                 </a:solidFill>
               </a:rPr>
-              <a:t>•  Escribe la fase de contención de un playbook de ransomware.</a:t>
-            </a:r>
-          </a:p>
-          <a:p>
-            <a:pPr>
-              <a:spcAft>
-                <a:spcPts val="600"/>
-              </a:spcAft>
-            </a:pPr>
-            <a:r>
-              <a:rPr sz="1500">
-                <a:solidFill>
-                  <a:srgbClr val="22282E"/>
-                </a:solidFill>
-              </a:rPr>
-              <a:t>•  Define cinco puntos de decisión para una cuenta comprometida.</a:t>
-            </a:r>
-          </a:p>
-          <a:p>
-            <a:pPr>
-              <a:spcAft>
-                <a:spcPts val="600"/>
-              </a:spcAft>
-            </a:pPr>
-            <a:r>
-              <a:rPr sz="1500">
-                <a:solidFill>
-                  <a:srgbClr val="22282E"/>
-                </a:solidFill>
-              </a:rPr>
-              <a:t>•  Mapea un playbook de malware a tres técnicas ATT&amp;CK.</a:t>
-            </a:r>
-          </a:p>
-          <a:p>
-            <a:pPr>
-              <a:spcAft>
-                <a:spcPts val="600"/>
-              </a:spcAft>
-            </a:pPr>
-            <a:r>
-              <a:rPr sz="1500">
-                <a:solidFill>
-                  <a:srgbClr val="22282E"/>
-                </a:solidFill>
-              </a:rPr>
-              <a:t>•  Diseña los criterios de escalado a legal y dirección.</a:t>
-            </a:r>
-          </a:p>
-          <a:p>
-            <a:pPr>
-              <a:spcAft>
-                <a:spcPts val="600"/>
-              </a:spcAft>
-            </a:pPr>
-            <a:r>
-              <a:rPr sz="1500">
-                <a:solidFill>
-                  <a:srgbClr val="22282E"/>
-                </a:solidFill>
-              </a:rPr>
-              <a:t>•  Identifica qué tres pasos automatizarías con SOAR y por qué.</a:t>
-            </a:r>
-          </a:p>
-          <a:p>
-            <a:pPr>
-              <a:spcAft>
-                <a:spcPts val="600"/>
-              </a:spcAft>
-            </a:pPr>
-            <a:r>
-              <a:rPr sz="1500">
-                <a:solidFill>
-                  <a:srgbClr val="22282E"/>
-                </a:solidFill>
-              </a:rPr>
-              <a:t>•  Crea un diagrama de flujo del playbook de phishing.</a:t>
+              <a:t>•  La alerta combina renombrados masivos y una nota de rescate. El playbook exige validar host, proceso y alcance, preservar telemetría disponible y decidir aislamiento según propagación e impacto. La…</a:t>
+            </a:r>
+          </a:p>
+          <a:p>
+            <a:pPr>
+              <a:spcAft>
+                <a:spcPts val="600"/>
+              </a:spcAft>
+            </a:pPr>
+            <a:r>
+              <a:rPr sz="1500">
+                <a:solidFill>
+                  <a:srgbClr val="22282E"/>
+                </a:solidFill>
+              </a:rPr>
+              <a:t>•  El documento no ordena «borrar malware». Antes de erradicar, registra imagen, memoria si es viable, identidad, conexiones y mecanismo de persistencia. La recuperación solo avanza desde un punto…</a:t>
             </a:r>
           </a:p>
         </p:txBody>
@@ -4748,7 +5409,7 @@
                   <a:srgbClr val="0B3D2E"/>
                 </a:solidFill>
               </a:rPr>
-              <a:t>📝 Reto verificable</a:t>
+              <a:t>✅ Criterio de dominio</a:t>
             </a:r>
           </a:p>
         </p:txBody>
@@ -4786,22 +5447,7 @@
                   <a:srgbClr val="22282E"/>
                 </a:solidFill>
               </a:rPr>
-              <a:t>•  Diseña un playbook completo para "cuenta de correo corporativa comprometida" con las seis fases PICERL, al menos cuatro puntos de decisión, mapeo a ATT&amp;CK, criterios de escalado y tres pasos marcados como automatizables.</a:t>
-            </a:r>
-          </a:p>
-          <a:p>
-            <a:pPr>
-              <a:spcAft>
-                <a:spcPts val="600"/>
-              </a:spcAft>
-            </a:pPr>
-            <a:r>
-              <a:rPr sz="1500">
-                <a:solidFill>
-                  <a:srgbClr val="22282E"/>
-                </a:solidFill>
-              </a:rPr>
-              <a:t>•  Criterio de aceptación: el playbook es ejecutable por otra persona sin ayuda, cada fase tiene pasos numerados con responsable, los puntos de decisión tienen criterio explícito, y hay al menos tres técnicas ATT&amp;CK referenciadas.</a:t>
+              <a:t>•  Dominas la clase cuando otra persona puede ejecutar tu playbook sin interpretación privada: cada paso produce evidencia, cada rama tiene criterios, autoridad y reversión, las dependencias han sido…</a:t>
             </a:r>
           </a:p>
         </p:txBody>
